--- a/docs/workshop/mentale-selbstverteidigung/WMDG-Workshop-Mentale-Selbstverteidigung.pptx
+++ b/docs/workshop/mentale-selbstverteidigung/WMDG-Workshop-Mentale-Selbstverteidigung.pptx
@@ -3539,7 +3539,7 @@
         </p:blipFill>
         <p:spPr>
           <a:xfrm>
-            <a:off x="777240" y="777240"/>
+            <a:off x="777240" y="685800"/>
             <a:ext cx="1371600" cy="1371600"/>
           </a:xfrm>
           <a:prstGeom prst="rect">
@@ -3555,7 +3555,7 @@
         </p:nvSpPr>
         <p:spPr>
           <a:xfrm>
-            <a:off x="777240" y="777240"/>
+            <a:off x="777240" y="685800"/>
             <a:ext cx="1371600" cy="1371600"/>
           </a:xfrm>
           <a:prstGeom prst="rect">
@@ -3594,7 +3594,7 @@
         </p:nvSpPr>
         <p:spPr>
           <a:xfrm>
-            <a:off x="2423160" y="868680"/>
+            <a:off x="2423160" y="640080"/>
             <a:ext cx="7315200" cy="365760"/>
           </a:xfrm>
           <a:prstGeom prst="rect">
@@ -3633,7 +3633,7 @@
         </p:nvSpPr>
         <p:spPr>
           <a:xfrm>
-            <a:off x="2377440" y="1188720"/>
+            <a:off x="2377440" y="960120"/>
             <a:ext cx="9052560" cy="914400"/>
           </a:xfrm>
           <a:prstGeom prst="rect">
@@ -3672,7 +3672,7 @@
         </p:nvSpPr>
         <p:spPr>
           <a:xfrm>
-            <a:off x="2395728" y="2148840"/>
+            <a:off x="2395728" y="1874520"/>
             <a:ext cx="9052560" cy="548640"/>
           </a:xfrm>
           <a:prstGeom prst="rect">
@@ -3901,7 +3901,7 @@
         </p:blipFill>
         <p:spPr>
           <a:xfrm>
-            <a:off x="777240" y="777240"/>
+            <a:off x="777240" y="685800"/>
             <a:ext cx="1371600" cy="1371600"/>
           </a:xfrm>
           <a:prstGeom prst="rect">
@@ -3917,7 +3917,7 @@
         </p:nvSpPr>
         <p:spPr>
           <a:xfrm>
-            <a:off x="777240" y="777240"/>
+            <a:off x="777240" y="685800"/>
             <a:ext cx="1371600" cy="1371600"/>
           </a:xfrm>
           <a:prstGeom prst="rect">
@@ -3956,7 +3956,7 @@
         </p:nvSpPr>
         <p:spPr>
           <a:xfrm>
-            <a:off x="2423160" y="868680"/>
+            <a:off x="2423160" y="640080"/>
             <a:ext cx="7315200" cy="365760"/>
           </a:xfrm>
           <a:prstGeom prst="rect">
@@ -3995,7 +3995,7 @@
         </p:nvSpPr>
         <p:spPr>
           <a:xfrm>
-            <a:off x="2377440" y="1188720"/>
+            <a:off x="2377440" y="960120"/>
             <a:ext cx="9052560" cy="914400"/>
           </a:xfrm>
           <a:prstGeom prst="rect">
@@ -4034,7 +4034,7 @@
         </p:nvSpPr>
         <p:spPr>
           <a:xfrm>
-            <a:off x="2395728" y="2148840"/>
+            <a:off x="2395728" y="1874520"/>
             <a:ext cx="9052560" cy="548640"/>
           </a:xfrm>
           <a:prstGeom prst="rect">
@@ -4263,7 +4263,7 @@
         </p:blipFill>
         <p:spPr>
           <a:xfrm>
-            <a:off x="777240" y="777240"/>
+            <a:off x="777240" y="685800"/>
             <a:ext cx="1371600" cy="1371600"/>
           </a:xfrm>
           <a:prstGeom prst="rect">
@@ -4279,7 +4279,7 @@
         </p:nvSpPr>
         <p:spPr>
           <a:xfrm>
-            <a:off x="777240" y="777240"/>
+            <a:off x="777240" y="685800"/>
             <a:ext cx="1371600" cy="1371600"/>
           </a:xfrm>
           <a:prstGeom prst="rect">
@@ -4318,7 +4318,7 @@
         </p:nvSpPr>
         <p:spPr>
           <a:xfrm>
-            <a:off x="2423160" y="868680"/>
+            <a:off x="2423160" y="640080"/>
             <a:ext cx="7315200" cy="365760"/>
           </a:xfrm>
           <a:prstGeom prst="rect">
@@ -4357,7 +4357,7 @@
         </p:nvSpPr>
         <p:spPr>
           <a:xfrm>
-            <a:off x="2377440" y="1188720"/>
+            <a:off x="2377440" y="960120"/>
             <a:ext cx="9052560" cy="914400"/>
           </a:xfrm>
           <a:prstGeom prst="rect">
@@ -4396,7 +4396,7 @@
         </p:nvSpPr>
         <p:spPr>
           <a:xfrm>
-            <a:off x="2395728" y="2148840"/>
+            <a:off x="2395728" y="1874520"/>
             <a:ext cx="9052560" cy="548640"/>
           </a:xfrm>
           <a:prstGeom prst="rect">
@@ -4625,7 +4625,7 @@
         </p:blipFill>
         <p:spPr>
           <a:xfrm>
-            <a:off x="777240" y="777240"/>
+            <a:off x="777240" y="685800"/>
             <a:ext cx="1371600" cy="1371600"/>
           </a:xfrm>
           <a:prstGeom prst="rect">
@@ -4641,7 +4641,7 @@
         </p:nvSpPr>
         <p:spPr>
           <a:xfrm>
-            <a:off x="777240" y="777240"/>
+            <a:off x="777240" y="685800"/>
             <a:ext cx="1371600" cy="1371600"/>
           </a:xfrm>
           <a:prstGeom prst="rect">
@@ -4680,7 +4680,7 @@
         </p:nvSpPr>
         <p:spPr>
           <a:xfrm>
-            <a:off x="2423160" y="868680"/>
+            <a:off x="2423160" y="640080"/>
             <a:ext cx="7315200" cy="365760"/>
           </a:xfrm>
           <a:prstGeom prst="rect">
@@ -4719,7 +4719,7 @@
         </p:nvSpPr>
         <p:spPr>
           <a:xfrm>
-            <a:off x="2377440" y="1188720"/>
+            <a:off x="2377440" y="960120"/>
             <a:ext cx="9052560" cy="914400"/>
           </a:xfrm>
           <a:prstGeom prst="rect">
@@ -4758,7 +4758,7 @@
         </p:nvSpPr>
         <p:spPr>
           <a:xfrm>
-            <a:off x="2395728" y="2148840"/>
+            <a:off x="2395728" y="1874520"/>
             <a:ext cx="9052560" cy="548640"/>
           </a:xfrm>
           <a:prstGeom prst="rect">
@@ -4987,7 +4987,7 @@
         </p:blipFill>
         <p:spPr>
           <a:xfrm>
-            <a:off x="777240" y="777240"/>
+            <a:off x="777240" y="685800"/>
             <a:ext cx="1371600" cy="1371600"/>
           </a:xfrm>
           <a:prstGeom prst="rect">
@@ -5003,7 +5003,7 @@
         </p:nvSpPr>
         <p:spPr>
           <a:xfrm>
-            <a:off x="777240" y="777240"/>
+            <a:off x="777240" y="685800"/>
             <a:ext cx="1371600" cy="1371600"/>
           </a:xfrm>
           <a:prstGeom prst="rect">
@@ -5042,7 +5042,7 @@
         </p:nvSpPr>
         <p:spPr>
           <a:xfrm>
-            <a:off x="2423160" y="868680"/>
+            <a:off x="2423160" y="640080"/>
             <a:ext cx="7315200" cy="365760"/>
           </a:xfrm>
           <a:prstGeom prst="rect">
@@ -5081,7 +5081,7 @@
         </p:nvSpPr>
         <p:spPr>
           <a:xfrm>
-            <a:off x="2377440" y="1188720"/>
+            <a:off x="2377440" y="960120"/>
             <a:ext cx="9052560" cy="914400"/>
           </a:xfrm>
           <a:prstGeom prst="rect">
@@ -5120,7 +5120,7 @@
         </p:nvSpPr>
         <p:spPr>
           <a:xfrm>
-            <a:off x="2395728" y="2148840"/>
+            <a:off x="2395728" y="1874520"/>
             <a:ext cx="9052560" cy="548640"/>
           </a:xfrm>
           <a:prstGeom prst="rect">
@@ -5349,7 +5349,7 @@
         </p:blipFill>
         <p:spPr>
           <a:xfrm>
-            <a:off x="777240" y="777240"/>
+            <a:off x="777240" y="685800"/>
             <a:ext cx="1371600" cy="1371600"/>
           </a:xfrm>
           <a:prstGeom prst="rect">
@@ -5365,7 +5365,7 @@
         </p:nvSpPr>
         <p:spPr>
           <a:xfrm>
-            <a:off x="777240" y="777240"/>
+            <a:off x="777240" y="685800"/>
             <a:ext cx="1371600" cy="1371600"/>
           </a:xfrm>
           <a:prstGeom prst="rect">
@@ -5404,7 +5404,7 @@
         </p:nvSpPr>
         <p:spPr>
           <a:xfrm>
-            <a:off x="2423160" y="868680"/>
+            <a:off x="2423160" y="640080"/>
             <a:ext cx="7315200" cy="365760"/>
           </a:xfrm>
           <a:prstGeom prst="rect">
@@ -5443,7 +5443,7 @@
         </p:nvSpPr>
         <p:spPr>
           <a:xfrm>
-            <a:off x="2377440" y="1188720"/>
+            <a:off x="2377440" y="960120"/>
             <a:ext cx="9052560" cy="914400"/>
           </a:xfrm>
           <a:prstGeom prst="rect">
@@ -5482,7 +5482,7 @@
         </p:nvSpPr>
         <p:spPr>
           <a:xfrm>
-            <a:off x="2395728" y="2148840"/>
+            <a:off x="2395728" y="1874520"/>
             <a:ext cx="9052560" cy="548640"/>
           </a:xfrm>
           <a:prstGeom prst="rect">
@@ -5711,7 +5711,7 @@
         </p:blipFill>
         <p:spPr>
           <a:xfrm>
-            <a:off x="777240" y="777240"/>
+            <a:off x="777240" y="685800"/>
             <a:ext cx="1371600" cy="1371600"/>
           </a:xfrm>
           <a:prstGeom prst="rect">
@@ -5727,7 +5727,7 @@
         </p:nvSpPr>
         <p:spPr>
           <a:xfrm>
-            <a:off x="777240" y="777240"/>
+            <a:off x="777240" y="685800"/>
             <a:ext cx="1371600" cy="1371600"/>
           </a:xfrm>
           <a:prstGeom prst="rect">
@@ -5766,7 +5766,7 @@
         </p:nvSpPr>
         <p:spPr>
           <a:xfrm>
-            <a:off x="2423160" y="868680"/>
+            <a:off x="2423160" y="640080"/>
             <a:ext cx="7315200" cy="365760"/>
           </a:xfrm>
           <a:prstGeom prst="rect">
@@ -5805,7 +5805,7 @@
         </p:nvSpPr>
         <p:spPr>
           <a:xfrm>
-            <a:off x="2377440" y="1188720"/>
+            <a:off x="2377440" y="960120"/>
             <a:ext cx="9052560" cy="914400"/>
           </a:xfrm>
           <a:prstGeom prst="rect">
@@ -5844,7 +5844,7 @@
         </p:nvSpPr>
         <p:spPr>
           <a:xfrm>
-            <a:off x="2395728" y="2148840"/>
+            <a:off x="2395728" y="1874520"/>
             <a:ext cx="9052560" cy="548640"/>
           </a:xfrm>
           <a:prstGeom prst="rect">
@@ -6073,7 +6073,7 @@
         </p:blipFill>
         <p:spPr>
           <a:xfrm>
-            <a:off x="777240" y="777240"/>
+            <a:off x="777240" y="685800"/>
             <a:ext cx="1371600" cy="1371600"/>
           </a:xfrm>
           <a:prstGeom prst="rect">
@@ -6089,7 +6089,7 @@
         </p:nvSpPr>
         <p:spPr>
           <a:xfrm>
-            <a:off x="777240" y="777240"/>
+            <a:off x="777240" y="685800"/>
             <a:ext cx="1371600" cy="1371600"/>
           </a:xfrm>
           <a:prstGeom prst="rect">
@@ -6128,7 +6128,7 @@
         </p:nvSpPr>
         <p:spPr>
           <a:xfrm>
-            <a:off x="2423160" y="868680"/>
+            <a:off x="2423160" y="640080"/>
             <a:ext cx="7315200" cy="365760"/>
           </a:xfrm>
           <a:prstGeom prst="rect">
@@ -6167,7 +6167,7 @@
         </p:nvSpPr>
         <p:spPr>
           <a:xfrm>
-            <a:off x="2377440" y="1188720"/>
+            <a:off x="2377440" y="960120"/>
             <a:ext cx="9052560" cy="914400"/>
           </a:xfrm>
           <a:prstGeom prst="rect">
@@ -6206,7 +6206,7 @@
         </p:nvSpPr>
         <p:spPr>
           <a:xfrm>
-            <a:off x="2395728" y="2148840"/>
+            <a:off x="2395728" y="1874520"/>
             <a:ext cx="9052560" cy="548640"/>
           </a:xfrm>
           <a:prstGeom prst="rect">
@@ -6435,7 +6435,7 @@
         </p:blipFill>
         <p:spPr>
           <a:xfrm>
-            <a:off x="777240" y="777240"/>
+            <a:off x="777240" y="685800"/>
             <a:ext cx="1371600" cy="1371600"/>
           </a:xfrm>
           <a:prstGeom prst="rect">
@@ -6451,7 +6451,7 @@
         </p:nvSpPr>
         <p:spPr>
           <a:xfrm>
-            <a:off x="777240" y="777240"/>
+            <a:off x="777240" y="685800"/>
             <a:ext cx="1371600" cy="1371600"/>
           </a:xfrm>
           <a:prstGeom prst="rect">
@@ -6490,7 +6490,7 @@
         </p:nvSpPr>
         <p:spPr>
           <a:xfrm>
-            <a:off x="2423160" y="868680"/>
+            <a:off x="2423160" y="640080"/>
             <a:ext cx="7315200" cy="365760"/>
           </a:xfrm>
           <a:prstGeom prst="rect">
@@ -6529,7 +6529,7 @@
         </p:nvSpPr>
         <p:spPr>
           <a:xfrm>
-            <a:off x="2377440" y="1188720"/>
+            <a:off x="2377440" y="960120"/>
             <a:ext cx="9052560" cy="914400"/>
           </a:xfrm>
           <a:prstGeom prst="rect">
@@ -6568,7 +6568,7 @@
         </p:nvSpPr>
         <p:spPr>
           <a:xfrm>
-            <a:off x="2395728" y="2148840"/>
+            <a:off x="2395728" y="1874520"/>
             <a:ext cx="9052560" cy="548640"/>
           </a:xfrm>
           <a:prstGeom prst="rect">
@@ -6797,7 +6797,7 @@
         </p:blipFill>
         <p:spPr>
           <a:xfrm>
-            <a:off x="777240" y="777240"/>
+            <a:off x="777240" y="685800"/>
             <a:ext cx="1371600" cy="1371600"/>
           </a:xfrm>
           <a:prstGeom prst="rect">
@@ -6813,7 +6813,7 @@
         </p:nvSpPr>
         <p:spPr>
           <a:xfrm>
-            <a:off x="777240" y="777240"/>
+            <a:off x="777240" y="685800"/>
             <a:ext cx="1371600" cy="1371600"/>
           </a:xfrm>
           <a:prstGeom prst="rect">
@@ -6852,7 +6852,7 @@
         </p:nvSpPr>
         <p:spPr>
           <a:xfrm>
-            <a:off x="2423160" y="868680"/>
+            <a:off x="2423160" y="640080"/>
             <a:ext cx="7315200" cy="365760"/>
           </a:xfrm>
           <a:prstGeom prst="rect">
@@ -6891,7 +6891,7 @@
         </p:nvSpPr>
         <p:spPr>
           <a:xfrm>
-            <a:off x="2377440" y="1188720"/>
+            <a:off x="2377440" y="960120"/>
             <a:ext cx="9052560" cy="914400"/>
           </a:xfrm>
           <a:prstGeom prst="rect">
@@ -6930,7 +6930,7 @@
         </p:nvSpPr>
         <p:spPr>
           <a:xfrm>
-            <a:off x="2395728" y="2148840"/>
+            <a:off x="2395728" y="1874520"/>
             <a:ext cx="9052560" cy="548640"/>
           </a:xfrm>
           <a:prstGeom prst="rect">
@@ -7974,7 +7974,7 @@
         </p:blipFill>
         <p:spPr>
           <a:xfrm>
-            <a:off x="777240" y="777240"/>
+            <a:off x="777240" y="685800"/>
             <a:ext cx="1371600" cy="1371600"/>
           </a:xfrm>
           <a:prstGeom prst="rect">
@@ -7990,7 +7990,7 @@
         </p:nvSpPr>
         <p:spPr>
           <a:xfrm>
-            <a:off x="777240" y="777240"/>
+            <a:off x="777240" y="685800"/>
             <a:ext cx="1371600" cy="1371600"/>
           </a:xfrm>
           <a:prstGeom prst="rect">
@@ -8029,7 +8029,7 @@
         </p:nvSpPr>
         <p:spPr>
           <a:xfrm>
-            <a:off x="2423160" y="868680"/>
+            <a:off x="2423160" y="640080"/>
             <a:ext cx="7315200" cy="365760"/>
           </a:xfrm>
           <a:prstGeom prst="rect">
@@ -8068,7 +8068,7 @@
         </p:nvSpPr>
         <p:spPr>
           <a:xfrm>
-            <a:off x="2377440" y="1188720"/>
+            <a:off x="2377440" y="960120"/>
             <a:ext cx="9052560" cy="914400"/>
           </a:xfrm>
           <a:prstGeom prst="rect">
@@ -8107,7 +8107,7 @@
         </p:nvSpPr>
         <p:spPr>
           <a:xfrm>
-            <a:off x="2395728" y="2148840"/>
+            <a:off x="2395728" y="1874520"/>
             <a:ext cx="9052560" cy="548640"/>
           </a:xfrm>
           <a:prstGeom prst="rect">
@@ -8336,7 +8336,7 @@
         </p:blipFill>
         <p:spPr>
           <a:xfrm>
-            <a:off x="777240" y="777240"/>
+            <a:off x="777240" y="685800"/>
             <a:ext cx="1371600" cy="1371600"/>
           </a:xfrm>
           <a:prstGeom prst="rect">
@@ -8352,7 +8352,7 @@
         </p:nvSpPr>
         <p:spPr>
           <a:xfrm>
-            <a:off x="777240" y="777240"/>
+            <a:off x="777240" y="685800"/>
             <a:ext cx="1371600" cy="1371600"/>
           </a:xfrm>
           <a:prstGeom prst="rect">
@@ -8391,7 +8391,7 @@
         </p:nvSpPr>
         <p:spPr>
           <a:xfrm>
-            <a:off x="2423160" y="868680"/>
+            <a:off x="2423160" y="640080"/>
             <a:ext cx="7315200" cy="365760"/>
           </a:xfrm>
           <a:prstGeom prst="rect">
@@ -8430,7 +8430,7 @@
         </p:nvSpPr>
         <p:spPr>
           <a:xfrm>
-            <a:off x="2377440" y="1188720"/>
+            <a:off x="2377440" y="960120"/>
             <a:ext cx="9052560" cy="914400"/>
           </a:xfrm>
           <a:prstGeom prst="rect">
@@ -8469,7 +8469,7 @@
         </p:nvSpPr>
         <p:spPr>
           <a:xfrm>
-            <a:off x="2395728" y="2148840"/>
+            <a:off x="2395728" y="1874520"/>
             <a:ext cx="9052560" cy="548640"/>
           </a:xfrm>
           <a:prstGeom prst="rect">
@@ -8698,7 +8698,7 @@
         </p:blipFill>
         <p:spPr>
           <a:xfrm>
-            <a:off x="777240" y="777240"/>
+            <a:off x="777240" y="685800"/>
             <a:ext cx="1371600" cy="1371600"/>
           </a:xfrm>
           <a:prstGeom prst="rect">
@@ -8714,7 +8714,7 @@
         </p:nvSpPr>
         <p:spPr>
           <a:xfrm>
-            <a:off x="777240" y="777240"/>
+            <a:off x="777240" y="685800"/>
             <a:ext cx="1371600" cy="1371600"/>
           </a:xfrm>
           <a:prstGeom prst="rect">
@@ -8753,7 +8753,7 @@
         </p:nvSpPr>
         <p:spPr>
           <a:xfrm>
-            <a:off x="2423160" y="868680"/>
+            <a:off x="2423160" y="640080"/>
             <a:ext cx="7315200" cy="365760"/>
           </a:xfrm>
           <a:prstGeom prst="rect">
@@ -8792,7 +8792,7 @@
         </p:nvSpPr>
         <p:spPr>
           <a:xfrm>
-            <a:off x="2377440" y="1188720"/>
+            <a:off x="2377440" y="960120"/>
             <a:ext cx="9052560" cy="914400"/>
           </a:xfrm>
           <a:prstGeom prst="rect">
@@ -8831,7 +8831,7 @@
         </p:nvSpPr>
         <p:spPr>
           <a:xfrm>
-            <a:off x="2395728" y="2148840"/>
+            <a:off x="2395728" y="1874520"/>
             <a:ext cx="9052560" cy="548640"/>
           </a:xfrm>
           <a:prstGeom prst="rect">
@@ -9060,7 +9060,7 @@
         </p:blipFill>
         <p:spPr>
           <a:xfrm>
-            <a:off x="777240" y="777240"/>
+            <a:off x="777240" y="685800"/>
             <a:ext cx="1371600" cy="1371600"/>
           </a:xfrm>
           <a:prstGeom prst="rect">
@@ -9076,7 +9076,7 @@
         </p:nvSpPr>
         <p:spPr>
           <a:xfrm>
-            <a:off x="777240" y="777240"/>
+            <a:off x="777240" y="685800"/>
             <a:ext cx="1371600" cy="1371600"/>
           </a:xfrm>
           <a:prstGeom prst="rect">
@@ -9115,7 +9115,7 @@
         </p:nvSpPr>
         <p:spPr>
           <a:xfrm>
-            <a:off x="2423160" y="868680"/>
+            <a:off x="2423160" y="640080"/>
             <a:ext cx="7315200" cy="365760"/>
           </a:xfrm>
           <a:prstGeom prst="rect">
@@ -9154,7 +9154,7 @@
         </p:nvSpPr>
         <p:spPr>
           <a:xfrm>
-            <a:off x="2377440" y="1188720"/>
+            <a:off x="2377440" y="960120"/>
             <a:ext cx="9052560" cy="914400"/>
           </a:xfrm>
           <a:prstGeom prst="rect">
@@ -9193,7 +9193,7 @@
         </p:nvSpPr>
         <p:spPr>
           <a:xfrm>
-            <a:off x="2395728" y="2148840"/>
+            <a:off x="2395728" y="1874520"/>
             <a:ext cx="9052560" cy="548640"/>
           </a:xfrm>
           <a:prstGeom prst="rect">
@@ -9422,7 +9422,7 @@
         </p:blipFill>
         <p:spPr>
           <a:xfrm>
-            <a:off x="777240" y="777240"/>
+            <a:off x="777240" y="685800"/>
             <a:ext cx="1371600" cy="1371600"/>
           </a:xfrm>
           <a:prstGeom prst="rect">
@@ -9438,7 +9438,7 @@
         </p:nvSpPr>
         <p:spPr>
           <a:xfrm>
-            <a:off x="777240" y="777240"/>
+            <a:off x="777240" y="685800"/>
             <a:ext cx="1371600" cy="1371600"/>
           </a:xfrm>
           <a:prstGeom prst="rect">
@@ -9477,7 +9477,7 @@
         </p:nvSpPr>
         <p:spPr>
           <a:xfrm>
-            <a:off x="2423160" y="868680"/>
+            <a:off x="2423160" y="640080"/>
             <a:ext cx="7315200" cy="365760"/>
           </a:xfrm>
           <a:prstGeom prst="rect">
@@ -9516,7 +9516,7 @@
         </p:nvSpPr>
         <p:spPr>
           <a:xfrm>
-            <a:off x="2377440" y="1188720"/>
+            <a:off x="2377440" y="960120"/>
             <a:ext cx="9052560" cy="914400"/>
           </a:xfrm>
           <a:prstGeom prst="rect">
@@ -9555,7 +9555,7 @@
         </p:nvSpPr>
         <p:spPr>
           <a:xfrm>
-            <a:off x="2395728" y="2148840"/>
+            <a:off x="2395728" y="1874520"/>
             <a:ext cx="9052560" cy="548640"/>
           </a:xfrm>
           <a:prstGeom prst="rect">
@@ -12941,7 +12941,7 @@
         </p:nvSpPr>
         <p:spPr>
           <a:xfrm>
-            <a:off x="731520" y="502920"/>
+            <a:off x="731520" y="640080"/>
             <a:ext cx="7315200" cy="274320"/>
           </a:xfrm>
           <a:prstGeom prst="rect">
@@ -12980,7 +12980,7 @@
         </p:nvSpPr>
         <p:spPr>
           <a:xfrm>
-            <a:off x="731520" y="822960"/>
+            <a:off x="731520" y="960120"/>
             <a:ext cx="10698480" cy="822960"/>
           </a:xfrm>
           <a:prstGeom prst="rect">
@@ -14203,7 +14203,7 @@
         </p:nvSpPr>
         <p:spPr>
           <a:xfrm>
-            <a:off x="731520" y="502920"/>
+            <a:off x="731520" y="640080"/>
             <a:ext cx="7315200" cy="274320"/>
           </a:xfrm>
           <a:prstGeom prst="rect">
@@ -14242,7 +14242,7 @@
         </p:nvSpPr>
         <p:spPr>
           <a:xfrm>
-            <a:off x="731520" y="822960"/>
+            <a:off x="731520" y="960120"/>
             <a:ext cx="10698480" cy="822960"/>
           </a:xfrm>
           <a:prstGeom prst="rect">
@@ -15473,7 +15473,7 @@
         </p:blipFill>
         <p:spPr>
           <a:xfrm>
-            <a:off x="777240" y="777240"/>
+            <a:off x="777240" y="685800"/>
             <a:ext cx="1371600" cy="1371600"/>
           </a:xfrm>
           <a:prstGeom prst="rect">
@@ -15489,7 +15489,7 @@
         </p:nvSpPr>
         <p:spPr>
           <a:xfrm>
-            <a:off x="777240" y="777240"/>
+            <a:off x="777240" y="685800"/>
             <a:ext cx="1371600" cy="1371600"/>
           </a:xfrm>
           <a:prstGeom prst="rect">
@@ -15528,7 +15528,7 @@
         </p:nvSpPr>
         <p:spPr>
           <a:xfrm>
-            <a:off x="2423160" y="868680"/>
+            <a:off x="2423160" y="640080"/>
             <a:ext cx="7315200" cy="365760"/>
           </a:xfrm>
           <a:prstGeom prst="rect">
@@ -15567,7 +15567,7 @@
         </p:nvSpPr>
         <p:spPr>
           <a:xfrm>
-            <a:off x="2377440" y="1188720"/>
+            <a:off x="2377440" y="960120"/>
             <a:ext cx="9052560" cy="914400"/>
           </a:xfrm>
           <a:prstGeom prst="rect">
@@ -15606,7 +15606,7 @@
         </p:nvSpPr>
         <p:spPr>
           <a:xfrm>
-            <a:off x="2395728" y="2148840"/>
+            <a:off x="2395728" y="1874520"/>
             <a:ext cx="9052560" cy="548640"/>
           </a:xfrm>
           <a:prstGeom prst="rect">
